--- a/report/Activity_2_Presentation_Designed.pptx
+++ b/report/Activity_2_Presentation_Designed.pptx
@@ -14584,7 +14584,7 @@
                 </a:solidFill>
                 <a:latin typeface="Calibri"/>
               </a:rPr>
-              <a:t>Python 3.12 · Flask 3.1.3 · matplotlib · no GPU</a:t>
+              <a:t>Python 3.12 · Flask 3.1.3 · matplotlib</a:t>
             </a:r>
           </a:p>
         </p:txBody>

--- a/report/Activity_2_Presentation_Designed.pptx
+++ b/report/Activity_2_Presentation_Designed.pptx
@@ -17076,7 +17076,7 @@
                 </a:solidFill>
                 <a:latin typeface="Calibri"/>
               </a:rPr>
-              <a:t>NOUN mix-ups on ambiguous words like “that” — a bigram HMM only sees one previous tag.</a:t>
+              <a:t>NOUN mix-ups on noun/adjective words (green, public) and unseen names — a bigram HMM only sees one previous tag.</a:t>
             </a:r>
           </a:p>
         </p:txBody>
